--- a/courses/build/teach-the-teachers/T-D4.zu.pptx
+++ b/courses/build/teach-the-teachers/T-D4.zu.pptx
@@ -4891,7 +4891,7 @@
                 </a:solidFill>
                 <a:latin typeface="Segoe Print"/>
               </a:rPr>
-              <a:t>Day 4</a:t>
+              <a:t>Usuku 4</a:t>
             </a:r>
           </a:p>
         </p:txBody>
@@ -4974,7 +4974,7 @@
                 </a:solidFill>
                 <a:latin typeface="Trebuchet MS"/>
               </a:rPr>
-              <a:t>Many ways in</a:t>
+              <a:t>Izindlela eziningi zokungena</a:t>
             </a:r>
           </a:p>
           <a:p>
@@ -4990,7 +4990,7 @@
                 </a:solidFill>
                 <a:latin typeface="Trebuchet MS"/>
               </a:rPr>
-              <a:t>Day 4 of 5</a:t>
+              <a:t>Usuku 4 kwezi-5</a:t>
             </a:r>
           </a:p>
         </p:txBody>
@@ -5296,7 +5296,7 @@
                 </a:solidFill>
                 <a:latin typeface="Segoe Print"/>
               </a:rPr>
-              <a:t>Step out: unpack</a:t>
+              <a:t>Phumani: sihlaziye</a:t>
             </a:r>
           </a:p>
         </p:txBody>
@@ -5373,13 +5373,13 @@
               </a:spcAft>
             </a:pPr>
             <a:r>
-              <a:rPr sz="2800" b="0">
+              <a:rPr sz="2400" b="0">
                 <a:solidFill>
                   <a:srgbClr val="1C1C1C"/>
                 </a:solidFill>
                 <a:latin typeface="Trebuchet MS"/>
               </a:rPr>
-              <a:t>•  What made the walk work?</a:t>
+              <a:t>•  Yini eyenze ukuhamba kwaphumelela?</a:t>
             </a:r>
           </a:p>
           <a:p>
@@ -5389,13 +5389,13 @@
               </a:spcAft>
             </a:pPr>
             <a:r>
-              <a:rPr sz="2800" b="0">
+              <a:rPr sz="2400" b="0">
                 <a:solidFill>
                   <a:srgbClr val="1C1C1C"/>
                 </a:solidFill>
                 <a:latin typeface="Trebuchet MS"/>
               </a:rPr>
-              <a:t>•  When will you use it?</a:t>
+              <a:t>•  Uzokusebenzisa nini?</a:t>
             </a:r>
           </a:p>
         </p:txBody>
@@ -5645,7 +5645,7 @@
                 </a:solidFill>
                 <a:latin typeface="Segoe Print"/>
               </a:rPr>
-              <a:t>Mode 3: the app</a:t>
+              <a:t>Indlela 3: i-app</a:t>
             </a:r>
           </a:p>
         </p:txBody>
@@ -5728,7 +5728,7 @@
                 </a:solidFill>
                 <a:latin typeface="Trebuchet MS"/>
               </a:rPr>
-              <a:t>Show · Record · Ask and look</a:t>
+              <a:t>Bonisa · Rekhoda · Buza ubheke</a:t>
             </a:r>
           </a:p>
         </p:txBody>
@@ -6200,7 +6200,7 @@
                 </a:solidFill>
                 <a:latin typeface="Segoe Print"/>
               </a:rPr>
-              <a:t>My Studies, offline</a:t>
+              <a:t>My Studies, ngaphandle kwe-inthanethi</a:t>
             </a:r>
           </a:p>
         </p:txBody>
@@ -6283,7 +6283,7 @@
                 </a:solidFill>
                 <a:latin typeface="Trebuchet MS"/>
               </a:rPr>
-              <a:t>•  Flight mode on</a:t>
+              <a:t>•  Vulani i-flight mode</a:t>
             </a:r>
           </a:p>
           <a:p>
@@ -6299,7 +6299,7 @@
                 </a:solidFill>
                 <a:latin typeface="Trebuchet MS"/>
               </a:rPr>
-              <a:t>•  Watch the clip, then do</a:t>
+              <a:t>•  Bukani ividiyo, bese niyenza</a:t>
             </a:r>
           </a:p>
           <a:p>
@@ -6315,7 +6315,7 @@
                 </a:solidFill>
                 <a:latin typeface="Trebuchet MS"/>
               </a:rPr>
-              <a:t>•  What can a clip show?</a:t>
+              <a:t>•  Ividiyo ingabonisa ini?</a:t>
             </a:r>
           </a:p>
         </p:txBody>
@@ -6864,13 +6864,13 @@
               </a:spcAft>
             </a:pPr>
             <a:r>
-              <a:rPr sz="3000" b="1">
+              <a:rPr sz="2600" b="1">
                 <a:solidFill>
                   <a:srgbClr val="1C1C1C"/>
                 </a:solidFill>
                 <a:latin typeface="Trebuchet MS"/>
               </a:rPr>
-              <a:t>•  Venue, date, attendance</a:t>
+              <a:t>•  Indawo, usuku, ababekhona</a:t>
             </a:r>
           </a:p>
           <a:p>
@@ -6880,13 +6880,13 @@
               </a:spcAft>
             </a:pPr>
             <a:r>
-              <a:rPr sz="3000" b="1">
+              <a:rPr sz="2600" b="1">
                 <a:solidFill>
                   <a:srgbClr val="1C1C1C"/>
                 </a:solidFill>
                 <a:latin typeface="Trebuchet MS"/>
               </a:rPr>
-              <a:t>•  Signatures and a photo</a:t>
+              <a:t>•  Amasiginesha nesithombe</a:t>
             </a:r>
           </a:p>
           <a:p>
@@ -6896,13 +6896,13 @@
               </a:spcAft>
             </a:pPr>
             <a:r>
-              <a:rPr sz="3000" b="1">
+              <a:rPr sz="2600" b="1">
                 <a:solidFill>
                   <a:srgbClr val="1C1C1C"/>
                 </a:solidFill>
                 <a:latin typeface="Trebuchet MS"/>
               </a:rPr>
-              <a:t>•  Feedback, saved offline</a:t>
+              <a:t>•  Impendulo, igcinwe ngaphandle kwe-inthanethi</a:t>
             </a:r>
           </a:p>
         </p:txBody>
@@ -7374,7 +7374,7 @@
                 </a:solidFill>
                 <a:latin typeface="Segoe Print"/>
               </a:rPr>
-              <a:t>Lima Vision: do we agree?</a:t>
+              <a:t>Lima Vision: siyavumelana?</a:t>
             </a:r>
           </a:p>
         </p:txBody>
@@ -7457,7 +7457,7 @@
                 </a:solidFill>
                 <a:latin typeface="Trebuchet MS"/>
               </a:rPr>
-              <a:t>•  Photograph the leaf</a:t>
+              <a:t>•  Thathani isithombe seqabunga</a:t>
             </a:r>
           </a:p>
           <a:p>
@@ -7473,7 +7473,7 @@
                 </a:solidFill>
                 <a:latin typeface="Trebuchet MS"/>
               </a:rPr>
-              <a:t>•  Read the result together</a:t>
+              <a:t>•  Fundani umphumela ndawonye</a:t>
             </a:r>
           </a:p>
           <a:p>
@@ -7489,7 +7489,7 @@
                 </a:solidFill>
                 <a:latin typeface="Trebuchet MS"/>
               </a:rPr>
-              <a:t>•  How could we check?</a:t>
+              <a:t>•  Singahlola kanjani?</a:t>
             </a:r>
           </a:p>
         </p:txBody>
@@ -7878,7 +7878,7 @@
                 </a:solidFill>
                 <a:latin typeface="Segoe Print"/>
               </a:rPr>
-              <a:t>Micro-teaching Round 4</a:t>
+              <a:t>Ukufundisa okuncane: Round 4</a:t>
             </a:r>
           </a:p>
         </p:txBody>
@@ -7955,13 +7955,13 @@
               </a:spcAft>
             </a:pPr>
             <a:r>
-              <a:rPr sz="3000" b="1">
+              <a:rPr sz="2600" b="1">
                 <a:solidFill>
                   <a:srgbClr val="1C1C1C"/>
                 </a:solidFill>
                 <a:latin typeface="Trebuchet MS"/>
               </a:rPr>
-              <a:t>•  20 minutes, pairs</a:t>
+              <a:t>•  Imizuzu 20, ngababili</a:t>
             </a:r>
           </a:p>
           <a:p>
@@ -7971,13 +7971,13 @@
               </a:spcAft>
             </a:pPr>
             <a:r>
-              <a:rPr sz="3000" b="1">
+              <a:rPr sz="2600" b="1">
                 <a:solidFill>
                   <a:srgbClr val="1C1C1C"/>
                 </a:solidFill>
                 <a:latin typeface="Trebuchet MS"/>
               </a:rPr>
-              <a:t>•  Slides or app — your choice</a:t>
+              <a:t>•  Ama-slide noma i-app — khethani</a:t>
             </a:r>
           </a:p>
           <a:p>
@@ -7987,13 +7987,13 @@
               </a:spcAft>
             </a:pPr>
             <a:r>
-              <a:rPr sz="3000" b="1">
+              <a:rPr sz="2600" b="1">
                 <a:solidFill>
                   <a:srgbClr val="1C1C1C"/>
                 </a:solidFill>
                 <a:latin typeface="Trebuchet MS"/>
               </a:rPr>
-              <a:t>•  A device may fail on purpose</a:t>
+              <a:t>•  Idivayisi ingahluleka ngamabomu</a:t>
             </a:r>
           </a:p>
         </p:txBody>
@@ -8299,7 +8299,7 @@
                 </a:solidFill>
                 <a:latin typeface="Segoe Print"/>
               </a:rPr>
-              <a:t>When the device fails</a:t>
+              <a:t>Uma idivayisi ihluleka</a:t>
             </a:r>
           </a:p>
         </p:txBody>
@@ -8376,13 +8376,13 @@
               </a:spcAft>
             </a:pPr>
             <a:r>
-              <a:rPr sz="2800" b="0">
+              <a:rPr sz="2400" b="0">
                 <a:solidFill>
                   <a:srgbClr val="1C1C1C"/>
                 </a:solidFill>
                 <a:latin typeface="Trebuchet MS"/>
               </a:rPr>
-              <a:t>•  Switch in 30 seconds</a:t>
+              <a:t>•  Shintsha ngemizuzwana 30</a:t>
             </a:r>
           </a:p>
           <a:p>
@@ -8392,13 +8392,13 @@
               </a:spcAft>
             </a:pPr>
             <a:r>
-              <a:rPr sz="2800" b="0">
+              <a:rPr sz="2400" b="0">
                 <a:solidFill>
                   <a:srgbClr val="1C1C1C"/>
                 </a:solidFill>
                 <a:latin typeface="Trebuchet MS"/>
               </a:rPr>
-              <a:t>•  Poster or flip-book</a:t>
+              <a:t>•  Iphosta noma incwajana yezithombe</a:t>
             </a:r>
           </a:p>
           <a:p>
@@ -8408,13 +8408,13 @@
               </a:spcAft>
             </a:pPr>
             <a:r>
-              <a:rPr sz="2800" b="0">
+              <a:rPr sz="2400" b="0">
                 <a:solidFill>
                   <a:srgbClr val="1C1C1C"/>
                 </a:solidFill>
                 <a:latin typeface="Trebuchet MS"/>
               </a:rPr>
-              <a:t>•  Don't apologise, keep going</a:t>
+              <a:t>•  Ungaxolisi, qhubeka</a:t>
             </a:r>
           </a:p>
         </p:txBody>
@@ -8720,7 +8720,7 @@
                 </a:solidFill>
                 <a:latin typeface="Segoe Print"/>
               </a:rPr>
-              <a:t>Course craft: report and certificates</a:t>
+              <a:t>Ubuciko besifundo: umbiko nezitifiketi</a:t>
             </a:r>
           </a:p>
         </p:txBody>
@@ -8803,7 +8803,7 @@
                 </a:solidFill>
                 <a:latin typeface="Trebuchet MS"/>
               </a:rPr>
-              <a:t>•  Daily report with register photo</a:t>
+              <a:t>•  Umbiko wansuku zonke nesithombe serejista</a:t>
             </a:r>
           </a:p>
           <a:p>
@@ -8819,7 +8819,7 @@
                 </a:solidFill>
                 <a:latin typeface="Trebuchet MS"/>
               </a:rPr>
-              <a:t>•  Attendance, not qualification</a:t>
+              <a:t>•  Ukuba khona, hhayi iziqu</a:t>
             </a:r>
           </a:p>
           <a:p>
@@ -8835,7 +8835,7 @@
                 </a:solidFill>
                 <a:latin typeface="Trebuchet MS"/>
               </a:rPr>
-              <a:t>•  Tomorrow: Round 5, 30 minutes</a:t>
+              <a:t>•  Kusasa: Round 5, imizuzu 30</a:t>
             </a:r>
           </a:p>
         </p:txBody>
@@ -9141,7 +9141,7 @@
                 </a:solidFill>
                 <a:latin typeface="Segoe Print"/>
               </a:rPr>
-              <a:t>Two brothers</a:t>
+              <a:t>Abafowethu ababili</a:t>
             </a:r>
           </a:p>
         </p:txBody>
@@ -9224,7 +9224,7 @@
                 </a:solidFill>
                 <a:latin typeface="Trebuchet MS"/>
               </a:rPr>
-              <a:t>•  Which brother would you ask for seed?</a:t>
+              <a:t>•  Ungacela imbewu komuphi umfowabo?</a:t>
             </a:r>
           </a:p>
         </p:txBody>
@@ -9530,7 +9530,7 @@
                 </a:solidFill>
                 <a:latin typeface="Segoe Print"/>
               </a:rPr>
-              <a:t>The story shape</a:t>
+              <a:t>Isimo sendaba</a:t>
             </a:r>
           </a:p>
         </p:txBody>
@@ -9613,7 +9613,7 @@
                 </a:solidFill>
                 <a:latin typeface="Trebuchet MS"/>
               </a:rPr>
-              <a:t>•  Someone like us, a problem</a:t>
+              <a:t>•  Umuntu ofana nathi, nenkinga</a:t>
             </a:r>
           </a:p>
           <a:p>
@@ -9629,7 +9629,7 @@
                 </a:solidFill>
                 <a:latin typeface="Trebuchet MS"/>
               </a:rPr>
-              <a:t>•  What they tried, what happened</a:t>
+              <a:t>•  Lokho akuzamile, nokwenzekile</a:t>
             </a:r>
           </a:p>
           <a:p>
@@ -9645,7 +9645,7 @@
                 </a:solidFill>
                 <a:latin typeface="Trebuchet MS"/>
               </a:rPr>
-              <a:t>•  A question to the room</a:t>
+              <a:t>•  Umbuzo kulabo abasegumbini</a:t>
             </a:r>
           </a:p>
         </p:txBody>
@@ -10034,7 +10034,7 @@
                 </a:solidFill>
                 <a:latin typeface="Segoe Print"/>
               </a:rPr>
-              <a:t>Make a song</a:t>
+              <a:t>Qambani ingoma</a:t>
             </a:r>
           </a:p>
         </p:txBody>
@@ -10117,7 +10117,7 @@
                 </a:solidFill>
                 <a:latin typeface="Trebuchet MS"/>
               </a:rPr>
-              <a:t>•  A tune everyone knows</a:t>
+              <a:t>•  Iculo wonke umuntu alaziyo</a:t>
             </a:r>
           </a:p>
           <a:p>
@@ -10133,7 +10133,7 @@
                 </a:solidFill>
                 <a:latin typeface="Trebuchet MS"/>
               </a:rPr>
-              <a:t>•  One key message</a:t>
+              <a:t>•  Umlayezo owodwa obalulekile</a:t>
             </a:r>
           </a:p>
           <a:p>
@@ -10149,7 +10149,7 @@
                 </a:solidFill>
                 <a:latin typeface="Trebuchet MS"/>
               </a:rPr>
-              <a:t>•  13 minutes</a:t>
+              <a:t>•  Imizuzu 13</a:t>
             </a:r>
           </a:p>
         </p:txBody>
@@ -10455,7 +10455,7 @@
                 </a:solidFill>
                 <a:latin typeface="Segoe Print"/>
               </a:rPr>
-              <a:t>Calm in a difficult moment</a:t>
+              <a:t>Ukuzola esikhathini esinzima</a:t>
             </a:r>
           </a:p>
         </p:txBody>
@@ -10532,13 +10532,13 @@
               </a:spcAft>
             </a:pPr>
             <a:r>
-              <a:rPr sz="2800" b="0">
+              <a:rPr sz="2400" b="0">
                 <a:solidFill>
                   <a:srgbClr val="1C1C1C"/>
                 </a:solidFill>
                 <a:latin typeface="Trebuchet MS"/>
               </a:rPr>
-              <a:t>•  Breathe · Name it kindly</a:t>
+              <a:t>•  Phefumula · Kusho ngomusa</a:t>
             </a:r>
           </a:p>
           <a:p>
@@ -10548,13 +10548,13 @@
               </a:spcAft>
             </a:pPr>
             <a:r>
-              <a:rPr sz="2800" b="0">
+              <a:rPr sz="2400" b="0">
                 <a:solidFill>
                   <a:srgbClr val="1C1C1C"/>
                 </a:solidFill>
                 <a:latin typeface="Trebuchet MS"/>
               </a:rPr>
-              <a:t>•  Listen, ask · Offer a way on</a:t>
+              <a:t>•  Lalela, ubuze · Nikeza indlela eya phambili</a:t>
             </a:r>
           </a:p>
           <a:p>
@@ -10564,13 +10564,13 @@
               </a:spcAft>
             </a:pPr>
             <a:r>
-              <a:rPr sz="2800" b="0">
+              <a:rPr sz="2400" b="0">
                 <a:solidFill>
                   <a:srgbClr val="1C1C1C"/>
                 </a:solidFill>
                 <a:latin typeface="Trebuchet MS"/>
               </a:rPr>
-              <a:t>•  Follow up privately</a:t>
+              <a:t>•  Landelela ngasese</a:t>
             </a:r>
           </a:p>
         </p:txBody>
@@ -10959,7 +10959,7 @@
                 </a:solidFill>
                 <a:latin typeface="Segoe Print"/>
               </a:rPr>
-              <a:t>Role plays in threes</a:t>
+              <a:t>Lingisani ngabathathu</a:t>
             </a:r>
           </a:p>
         </p:txBody>
@@ -11042,7 +11042,7 @@
                 </a:solidFill>
                 <a:latin typeface="Trebuchet MS"/>
               </a:rPr>
-              <a:t>•  Facilitator · Learner · Observer</a:t>
+              <a:t>•  Umqeqeshi · Umfundi · Umbukeli</a:t>
             </a:r>
           </a:p>
           <a:p>
@@ -11058,7 +11058,7 @@
                 </a:solidFill>
                 <a:latin typeface="Trebuchet MS"/>
               </a:rPr>
-              <a:t>•  3 minutes play, 3 minutes talk</a:t>
+              <a:t>•  Imizuzu 3 yokulingisa, imizuzu 3 yokukhuluma</a:t>
             </a:r>
           </a:p>
           <a:p>
@@ -11074,7 +11074,7 @@
                 </a:solidFill>
                 <a:latin typeface="Trebuchet MS"/>
               </a:rPr>
-              <a:t>•  Rotate three times</a:t>
+              <a:t>•  Shintshanani kathathu</a:t>
             </a:r>
           </a:p>
         </p:txBody>
@@ -11380,7 +11380,7 @@
                 </a:solidFill>
                 <a:latin typeface="Segoe Print"/>
               </a:rPr>
-              <a:t>Model lesson: gallery walk</a:t>
+              <a:t>Isifundo esiyisibonelo: ukuhamba emibukisweni</a:t>
             </a:r>
           </a:p>
         </p:txBody>
@@ -11463,7 +11463,7 @@
                 </a:solidFill>
                 <a:latin typeface="Trebuchet MS"/>
               </a:rPr>
-              <a:t>Who made these holes?</a:t>
+              <a:t>Ubani owenze lezi zimbobo?</a:t>
             </a:r>
           </a:p>
         </p:txBody>
@@ -11852,7 +11852,7 @@
                 </a:solidFill>
                 <a:latin typeface="Segoe Print"/>
               </a:rPr>
-              <a:t>Six stations</a:t>
+              <a:t>Iziteshi eziyisithupha</a:t>
             </a:r>
           </a:p>
         </p:txBody>
@@ -11929,13 +11929,13 @@
               </a:spcAft>
             </a:pPr>
             <a:r>
-              <a:rPr sz="3000" b="1">
+              <a:rPr sz="2600" b="1">
                 <a:solidFill>
                   <a:srgbClr val="1C1C1C"/>
                 </a:solidFill>
                 <a:latin typeface="Trebuchet MS"/>
               </a:rPr>
-              <a:t>•  A job at every station</a:t>
+              <a:t>•  Umsebenzi esiteshini ngasinye</a:t>
             </a:r>
           </a:p>
           <a:p>
@@ -11945,13 +11945,13 @@
               </a:spcAft>
             </a:pPr>
             <a:r>
-              <a:rPr sz="3000" b="1">
+              <a:rPr sz="2600" b="1">
                 <a:solidFill>
                   <a:srgbClr val="1C1C1C"/>
                 </a:solidFill>
                 <a:latin typeface="Trebuchet MS"/>
               </a:rPr>
-              <a:t>•  6 minutes, then move clockwise</a:t>
+              <a:t>•  Imizuzu 6, bese niya phambili njengewashi</a:t>
             </a:r>
           </a:p>
           <a:p>
@@ -11961,13 +11961,13 @@
               </a:spcAft>
             </a:pPr>
             <a:r>
-              <a:rPr sz="3000" b="1">
+              <a:rPr sz="2600" b="1">
                 <a:solidFill>
                   <a:srgbClr val="1C1C1C"/>
                 </a:solidFill>
                 <a:latin typeface="Trebuchet MS"/>
               </a:rPr>
-              <a:t>•  Leave your group's mark</a:t>
+              <a:t>•  Shiyani uphawu lweqembu lenu</a:t>
             </a:r>
           </a:p>
         </p:txBody>
@@ -12273,7 +12273,7 @@
                 </a:solidFill>
                 <a:latin typeface="Segoe Print"/>
               </a:rPr>
-              <a:t>Prevent first, spray last</a:t>
+              <a:t>Vimbela kuqala, fafaza ekugcineni</a:t>
             </a:r>
           </a:p>
         </p:txBody>
@@ -12350,13 +12350,13 @@
               </a:spcAft>
             </a:pPr>
             <a:r>
-              <a:rPr sz="2800" b="0">
+              <a:rPr sz="2400" b="0">
                 <a:solidFill>
                   <a:srgbClr val="1C1C1C"/>
                 </a:solidFill>
                 <a:latin typeface="Trebuchet MS"/>
               </a:rPr>
-              <a:t>•  Healthy soil, mixed plants</a:t>
+              <a:t>•  Inhlabathi ephilile, izitshalo ezixubile</a:t>
             </a:r>
           </a:p>
           <a:p>
@@ -12366,13 +12366,13 @@
               </a:spcAft>
             </a:pPr>
             <a:r>
-              <a:rPr sz="2800" b="0">
+              <a:rPr sz="2400" b="0">
                 <a:solidFill>
                   <a:srgbClr val="1C1C1C"/>
                 </a:solidFill>
                 <a:latin typeface="Trebuchet MS"/>
               </a:rPr>
-              <a:t>•  Look often, act early</a:t>
+              <a:t>•  Bheka njalo, wenze masinyane</a:t>
             </a:r>
           </a:p>
           <a:p>
@@ -12382,13 +12382,13 @@
               </a:spcAft>
             </a:pPr>
             <a:r>
-              <a:rPr sz="2800" b="0">
+              <a:rPr sz="2400" b="0">
                 <a:solidFill>
                   <a:srgbClr val="1C1C1C"/>
                 </a:solidFill>
                 <a:latin typeface="Trebuchet MS"/>
               </a:rPr>
-              <a:t>•  Spray last</a:t>
+              <a:t>•  Fafaza ekugcineni</a:t>
             </a:r>
           </a:p>
         </p:txBody>
